--- a/public/fun/pack/pptx/birthday/돌잔치_06_성장기록중심_봄비창가.pptx
+++ b/public/fun/pack/pptx/birthday/돌잔치_06_성장기록중심_봄비창가.pptx
@@ -3347,7 +3347,7 @@
             <a:r>
               <a:rPr sz="4000" b="1" i="0">
                 <a:solidFill>
-                  <a:srgbClr val="29465B"/>
+                  <a:srgbClr val="224E6D"/>
                 </a:solidFill>
               </a:rPr>
               <a:t>첫 번째 생일</a:t>
@@ -3385,7 +3385,7 @@
             <a:r>
               <a:rPr sz="1700" b="0" i="1">
                 <a:solidFill>
-                  <a:srgbClr val="29465B"/>
+                  <a:srgbClr val="224E6D"/>
                 </a:solidFill>
               </a:rPr>
               <a:t>뒤집고, 기고, 일어서기까지 일 년이 걸렸습니다</a:t>
@@ -3460,7 +3460,7 @@
     <p:bg>
       <p:bgPr>
         <a:solidFill>
-          <a:srgbClr val="F1F5F9"/>
+          <a:srgbClr val="F3F8FC"/>
         </a:solidFill>
         <a:effectLst/>
       </p:bgPr>
@@ -3487,7 +3487,7 @@
             <a:avLst/>
           </a:prstGeom>
           <a:solidFill>
-            <a:srgbClr val="497DA2"/>
+            <a:srgbClr val="5196C8"/>
           </a:solidFill>
           <a:ln>
             <a:noFill/>
@@ -3516,7 +3516,7 @@
             <a:avLst/>
           </a:prstGeom>
           <a:solidFill>
-            <a:srgbClr val="8D3F46"/>
+            <a:srgbClr val="339941"/>
           </a:solidFill>
           <a:ln>
             <a:noFill/>
@@ -3560,7 +3560,7 @@
             <a:r>
               <a:rPr sz="3000" b="1" i="0">
                 <a:solidFill>
-                  <a:srgbClr val="29465B"/>
+                  <a:srgbClr val="224E6D"/>
                 </a:solidFill>
               </a:rPr>
               <a:t>우리 아기를 소개합니다</a:t>
@@ -3585,11 +3585,11 @@
             </a:avLst>
           </a:prstGeom>
           <a:solidFill>
-            <a:srgbClr val="D3E3EE"/>
+            <a:srgbClr val="D4E8F7"/>
           </a:solidFill>
           <a:ln w="19050">
             <a:solidFill>
-              <a:srgbClr val="497DA2"/>
+              <a:srgbClr val="5196C8"/>
             </a:solidFill>
             <a:prstDash val="dash"/>
           </a:ln>
@@ -3608,7 +3608,7 @@
             <a:r>
               <a:rPr sz="1400" b="0" i="0">
                 <a:solidFill>
-                  <a:srgbClr val="29465B"/>
+                  <a:srgbClr val="224E6D"/>
                 </a:solidFill>
               </a:rPr>
               <a:t>아기 사진을 넣어 주세요</a:t>
@@ -3648,7 +3648,7 @@
                       <a:r>
                         <a:rPr sz="1500" b="1">
                           <a:solidFill>
-                            <a:srgbClr val="29465B"/>
+                            <a:srgbClr val="224E6D"/>
                           </a:solidFill>
                         </a:rPr>
                         <a:t>이름</a:t>
@@ -3658,30 +3658,30 @@
                   <a:tcPr anchor="ctr" marL="73152" marR="73152">
                     <a:lnL w="9525" cap="flat" cmpd="sng" algn="ctr">
                       <a:solidFill>
-                        <a:srgbClr val="D3E3EE"/>
+                        <a:srgbClr val="D4E8F7"/>
                       </a:solidFill>
                       <a:prstDash val="solid"/>
                     </a:lnL>
                     <a:lnR w="9525" cap="flat" cmpd="sng" algn="ctr">
                       <a:solidFill>
-                        <a:srgbClr val="D3E3EE"/>
+                        <a:srgbClr val="D4E8F7"/>
                       </a:solidFill>
                       <a:prstDash val="solid"/>
                     </a:lnR>
                     <a:lnT w="9525" cap="flat" cmpd="sng" algn="ctr">
                       <a:solidFill>
-                        <a:srgbClr val="D3E3EE"/>
+                        <a:srgbClr val="D4E8F7"/>
                       </a:solidFill>
                       <a:prstDash val="solid"/>
                     </a:lnT>
                     <a:lnB w="9525" cap="flat" cmpd="sng" algn="ctr">
                       <a:solidFill>
-                        <a:srgbClr val="D3E3EE"/>
+                        <a:srgbClr val="D4E8F7"/>
                       </a:solidFill>
                       <a:prstDash val="solid"/>
                     </a:lnB>
                     <a:solidFill>
-                      <a:srgbClr val="D3E3EE"/>
+                      <a:srgbClr val="D4E8F7"/>
                     </a:solidFill>
                   </a:tcPr>
                 </a:tc>
@@ -3704,30 +3704,30 @@
                   <a:tcPr anchor="ctr" marL="73152" marR="73152">
                     <a:lnL w="9525" cap="flat" cmpd="sng" algn="ctr">
                       <a:solidFill>
-                        <a:srgbClr val="D3E3EE"/>
+                        <a:srgbClr val="D4E8F7"/>
                       </a:solidFill>
                       <a:prstDash val="solid"/>
                     </a:lnL>
                     <a:lnR w="9525" cap="flat" cmpd="sng" algn="ctr">
                       <a:solidFill>
-                        <a:srgbClr val="D3E3EE"/>
+                        <a:srgbClr val="D4E8F7"/>
                       </a:solidFill>
                       <a:prstDash val="solid"/>
                     </a:lnR>
                     <a:lnT w="9525" cap="flat" cmpd="sng" algn="ctr">
                       <a:solidFill>
-                        <a:srgbClr val="D3E3EE"/>
+                        <a:srgbClr val="D4E8F7"/>
                       </a:solidFill>
                       <a:prstDash val="solid"/>
                     </a:lnT>
                     <a:lnB w="9525" cap="flat" cmpd="sng" algn="ctr">
                       <a:solidFill>
-                        <a:srgbClr val="D3E3EE"/>
+                        <a:srgbClr val="D4E8F7"/>
                       </a:solidFill>
                       <a:prstDash val="solid"/>
                     </a:lnB>
                     <a:solidFill>
-                      <a:srgbClr val="F1F5F9"/>
+                      <a:srgbClr val="F3F8FC"/>
                     </a:solidFill>
                   </a:tcPr>
                 </a:tc>
@@ -3742,7 +3742,7 @@
                       <a:r>
                         <a:rPr sz="1500" b="1">
                           <a:solidFill>
-                            <a:srgbClr val="29465B"/>
+                            <a:srgbClr val="224E6D"/>
                           </a:solidFill>
                         </a:rPr>
                         <a:t>생일</a:t>
@@ -3752,30 +3752,30 @@
                   <a:tcPr anchor="ctr" marL="73152" marR="73152">
                     <a:lnL w="9525" cap="flat" cmpd="sng" algn="ctr">
                       <a:solidFill>
-                        <a:srgbClr val="D3E3EE"/>
+                        <a:srgbClr val="D4E8F7"/>
                       </a:solidFill>
                       <a:prstDash val="solid"/>
                     </a:lnL>
                     <a:lnR w="9525" cap="flat" cmpd="sng" algn="ctr">
                       <a:solidFill>
-                        <a:srgbClr val="D3E3EE"/>
+                        <a:srgbClr val="D4E8F7"/>
                       </a:solidFill>
                       <a:prstDash val="solid"/>
                     </a:lnR>
                     <a:lnT w="9525" cap="flat" cmpd="sng" algn="ctr">
                       <a:solidFill>
-                        <a:srgbClr val="D3E3EE"/>
+                        <a:srgbClr val="D4E8F7"/>
                       </a:solidFill>
                       <a:prstDash val="solid"/>
                     </a:lnT>
                     <a:lnB w="9525" cap="flat" cmpd="sng" algn="ctr">
                       <a:solidFill>
-                        <a:srgbClr val="D3E3EE"/>
+                        <a:srgbClr val="D4E8F7"/>
                       </a:solidFill>
                       <a:prstDash val="solid"/>
                     </a:lnB>
                     <a:solidFill>
-                      <a:srgbClr val="D3E3EE"/>
+                      <a:srgbClr val="D4E8F7"/>
                     </a:solidFill>
                   </a:tcPr>
                 </a:tc>
@@ -3798,25 +3798,25 @@
                   <a:tcPr anchor="ctr" marL="73152" marR="73152">
                     <a:lnL w="9525" cap="flat" cmpd="sng" algn="ctr">
                       <a:solidFill>
-                        <a:srgbClr val="D3E3EE"/>
+                        <a:srgbClr val="D4E8F7"/>
                       </a:solidFill>
                       <a:prstDash val="solid"/>
                     </a:lnL>
                     <a:lnR w="9525" cap="flat" cmpd="sng" algn="ctr">
                       <a:solidFill>
-                        <a:srgbClr val="D3E3EE"/>
+                        <a:srgbClr val="D4E8F7"/>
                       </a:solidFill>
                       <a:prstDash val="solid"/>
                     </a:lnR>
                     <a:lnT w="9525" cap="flat" cmpd="sng" algn="ctr">
                       <a:solidFill>
-                        <a:srgbClr val="D3E3EE"/>
+                        <a:srgbClr val="D4E8F7"/>
                       </a:solidFill>
                       <a:prstDash val="solid"/>
                     </a:lnT>
                     <a:lnB w="9525" cap="flat" cmpd="sng" algn="ctr">
                       <a:solidFill>
-                        <a:srgbClr val="D3E3EE"/>
+                        <a:srgbClr val="D4E8F7"/>
                       </a:solidFill>
                       <a:prstDash val="solid"/>
                     </a:lnB>
@@ -3836,7 +3836,7 @@
                       <a:r>
                         <a:rPr sz="1500" b="1">
                           <a:solidFill>
-                            <a:srgbClr val="29465B"/>
+                            <a:srgbClr val="224E6D"/>
                           </a:solidFill>
                         </a:rPr>
                         <a:t>키 · 몸무게</a:t>
@@ -3846,30 +3846,30 @@
                   <a:tcPr anchor="ctr" marL="73152" marR="73152">
                     <a:lnL w="9525" cap="flat" cmpd="sng" algn="ctr">
                       <a:solidFill>
-                        <a:srgbClr val="D3E3EE"/>
+                        <a:srgbClr val="D4E8F7"/>
                       </a:solidFill>
                       <a:prstDash val="solid"/>
                     </a:lnL>
                     <a:lnR w="9525" cap="flat" cmpd="sng" algn="ctr">
                       <a:solidFill>
-                        <a:srgbClr val="D3E3EE"/>
+                        <a:srgbClr val="D4E8F7"/>
                       </a:solidFill>
                       <a:prstDash val="solid"/>
                     </a:lnR>
                     <a:lnT w="9525" cap="flat" cmpd="sng" algn="ctr">
                       <a:solidFill>
-                        <a:srgbClr val="D3E3EE"/>
+                        <a:srgbClr val="D4E8F7"/>
                       </a:solidFill>
                       <a:prstDash val="solid"/>
                     </a:lnT>
                     <a:lnB w="9525" cap="flat" cmpd="sng" algn="ctr">
                       <a:solidFill>
-                        <a:srgbClr val="D3E3EE"/>
+                        <a:srgbClr val="D4E8F7"/>
                       </a:solidFill>
                       <a:prstDash val="solid"/>
                     </a:lnB>
                     <a:solidFill>
-                      <a:srgbClr val="D3E3EE"/>
+                      <a:srgbClr val="D4E8F7"/>
                     </a:solidFill>
                   </a:tcPr>
                 </a:tc>
@@ -3892,30 +3892,30 @@
                   <a:tcPr anchor="ctr" marL="73152" marR="73152">
                     <a:lnL w="9525" cap="flat" cmpd="sng" algn="ctr">
                       <a:solidFill>
-                        <a:srgbClr val="D3E3EE"/>
+                        <a:srgbClr val="D4E8F7"/>
                       </a:solidFill>
                       <a:prstDash val="solid"/>
                     </a:lnL>
                     <a:lnR w="9525" cap="flat" cmpd="sng" algn="ctr">
                       <a:solidFill>
-                        <a:srgbClr val="D3E3EE"/>
+                        <a:srgbClr val="D4E8F7"/>
                       </a:solidFill>
                       <a:prstDash val="solid"/>
                     </a:lnR>
                     <a:lnT w="9525" cap="flat" cmpd="sng" algn="ctr">
                       <a:solidFill>
-                        <a:srgbClr val="D3E3EE"/>
+                        <a:srgbClr val="D4E8F7"/>
                       </a:solidFill>
                       <a:prstDash val="solid"/>
                     </a:lnT>
                     <a:lnB w="9525" cap="flat" cmpd="sng" algn="ctr">
                       <a:solidFill>
-                        <a:srgbClr val="D3E3EE"/>
+                        <a:srgbClr val="D4E8F7"/>
                       </a:solidFill>
                       <a:prstDash val="solid"/>
                     </a:lnB>
                     <a:solidFill>
-                      <a:srgbClr val="F1F5F9"/>
+                      <a:srgbClr val="F3F8FC"/>
                     </a:solidFill>
                   </a:tcPr>
                 </a:tc>
@@ -3930,7 +3930,7 @@
                       <a:r>
                         <a:rPr sz="1500" b="1">
                           <a:solidFill>
-                            <a:srgbClr val="29465B"/>
+                            <a:srgbClr val="224E6D"/>
                           </a:solidFill>
                         </a:rPr>
                         <a:t>좋아하는 것</a:t>
@@ -3940,30 +3940,30 @@
                   <a:tcPr anchor="ctr" marL="73152" marR="73152">
                     <a:lnL w="9525" cap="flat" cmpd="sng" algn="ctr">
                       <a:solidFill>
-                        <a:srgbClr val="D3E3EE"/>
+                        <a:srgbClr val="D4E8F7"/>
                       </a:solidFill>
                       <a:prstDash val="solid"/>
                     </a:lnL>
                     <a:lnR w="9525" cap="flat" cmpd="sng" algn="ctr">
                       <a:solidFill>
-                        <a:srgbClr val="D3E3EE"/>
+                        <a:srgbClr val="D4E8F7"/>
                       </a:solidFill>
                       <a:prstDash val="solid"/>
                     </a:lnR>
                     <a:lnT w="9525" cap="flat" cmpd="sng" algn="ctr">
                       <a:solidFill>
-                        <a:srgbClr val="D3E3EE"/>
+                        <a:srgbClr val="D4E8F7"/>
                       </a:solidFill>
                       <a:prstDash val="solid"/>
                     </a:lnT>
                     <a:lnB w="9525" cap="flat" cmpd="sng" algn="ctr">
                       <a:solidFill>
-                        <a:srgbClr val="D3E3EE"/>
+                        <a:srgbClr val="D4E8F7"/>
                       </a:solidFill>
                       <a:prstDash val="solid"/>
                     </a:lnB>
                     <a:solidFill>
-                      <a:srgbClr val="D3E3EE"/>
+                      <a:srgbClr val="D4E8F7"/>
                     </a:solidFill>
                   </a:tcPr>
                 </a:tc>
@@ -3986,25 +3986,25 @@
                   <a:tcPr anchor="ctr" marL="73152" marR="73152">
                     <a:lnL w="9525" cap="flat" cmpd="sng" algn="ctr">
                       <a:solidFill>
-                        <a:srgbClr val="D3E3EE"/>
+                        <a:srgbClr val="D4E8F7"/>
                       </a:solidFill>
                       <a:prstDash val="solid"/>
                     </a:lnL>
                     <a:lnR w="9525" cap="flat" cmpd="sng" algn="ctr">
                       <a:solidFill>
-                        <a:srgbClr val="D3E3EE"/>
+                        <a:srgbClr val="D4E8F7"/>
                       </a:solidFill>
                       <a:prstDash val="solid"/>
                     </a:lnR>
                     <a:lnT w="9525" cap="flat" cmpd="sng" algn="ctr">
                       <a:solidFill>
-                        <a:srgbClr val="D3E3EE"/>
+                        <a:srgbClr val="D4E8F7"/>
                       </a:solidFill>
                       <a:prstDash val="solid"/>
                     </a:lnT>
                     <a:lnB w="9525" cap="flat" cmpd="sng" algn="ctr">
                       <a:solidFill>
-                        <a:srgbClr val="D3E3EE"/>
+                        <a:srgbClr val="D4E8F7"/>
                       </a:solidFill>
                       <a:prstDash val="solid"/>
                     </a:lnB>
@@ -4024,7 +4024,7 @@
                       <a:r>
                         <a:rPr sz="1500" b="1">
                           <a:solidFill>
-                            <a:srgbClr val="29465B"/>
+                            <a:srgbClr val="224E6D"/>
                           </a:solidFill>
                         </a:rPr>
                         <a:t>별명</a:t>
@@ -4034,30 +4034,30 @@
                   <a:tcPr anchor="ctr" marL="73152" marR="73152">
                     <a:lnL w="9525" cap="flat" cmpd="sng" algn="ctr">
                       <a:solidFill>
-                        <a:srgbClr val="D3E3EE"/>
+                        <a:srgbClr val="D4E8F7"/>
                       </a:solidFill>
                       <a:prstDash val="solid"/>
                     </a:lnL>
                     <a:lnR w="9525" cap="flat" cmpd="sng" algn="ctr">
                       <a:solidFill>
-                        <a:srgbClr val="D3E3EE"/>
+                        <a:srgbClr val="D4E8F7"/>
                       </a:solidFill>
                       <a:prstDash val="solid"/>
                     </a:lnR>
                     <a:lnT w="9525" cap="flat" cmpd="sng" algn="ctr">
                       <a:solidFill>
-                        <a:srgbClr val="D3E3EE"/>
+                        <a:srgbClr val="D4E8F7"/>
                       </a:solidFill>
                       <a:prstDash val="solid"/>
                     </a:lnT>
                     <a:lnB w="9525" cap="flat" cmpd="sng" algn="ctr">
                       <a:solidFill>
-                        <a:srgbClr val="D3E3EE"/>
+                        <a:srgbClr val="D4E8F7"/>
                       </a:solidFill>
                       <a:prstDash val="solid"/>
                     </a:lnB>
                     <a:solidFill>
-                      <a:srgbClr val="D3E3EE"/>
+                      <a:srgbClr val="D4E8F7"/>
                     </a:solidFill>
                   </a:tcPr>
                 </a:tc>
@@ -4080,30 +4080,30 @@
                   <a:tcPr anchor="ctr" marL="73152" marR="73152">
                     <a:lnL w="9525" cap="flat" cmpd="sng" algn="ctr">
                       <a:solidFill>
-                        <a:srgbClr val="D3E3EE"/>
+                        <a:srgbClr val="D4E8F7"/>
                       </a:solidFill>
                       <a:prstDash val="solid"/>
                     </a:lnL>
                     <a:lnR w="9525" cap="flat" cmpd="sng" algn="ctr">
                       <a:solidFill>
-                        <a:srgbClr val="D3E3EE"/>
+                        <a:srgbClr val="D4E8F7"/>
                       </a:solidFill>
                       <a:prstDash val="solid"/>
                     </a:lnR>
                     <a:lnT w="9525" cap="flat" cmpd="sng" algn="ctr">
                       <a:solidFill>
-                        <a:srgbClr val="D3E3EE"/>
+                        <a:srgbClr val="D4E8F7"/>
                       </a:solidFill>
                       <a:prstDash val="solid"/>
                     </a:lnT>
                     <a:lnB w="9525" cap="flat" cmpd="sng" algn="ctr">
                       <a:solidFill>
-                        <a:srgbClr val="D3E3EE"/>
+                        <a:srgbClr val="D4E8F7"/>
                       </a:solidFill>
                       <a:prstDash val="solid"/>
                     </a:lnB>
                     <a:solidFill>
-                      <a:srgbClr val="F1F5F9"/>
+                      <a:srgbClr val="F3F8FC"/>
                     </a:solidFill>
                   </a:tcPr>
                 </a:tc>
@@ -4118,7 +4118,7 @@
                       <a:r>
                         <a:rPr sz="1500" b="1">
                           <a:solidFill>
-                            <a:srgbClr val="29465B"/>
+                            <a:srgbClr val="224E6D"/>
                           </a:solidFill>
                         </a:rPr>
                         <a:t>부모의 마음</a:t>
@@ -4128,30 +4128,30 @@
                   <a:tcPr anchor="ctr" marL="73152" marR="73152">
                     <a:lnL w="9525" cap="flat" cmpd="sng" algn="ctr">
                       <a:solidFill>
-                        <a:srgbClr val="D3E3EE"/>
+                        <a:srgbClr val="D4E8F7"/>
                       </a:solidFill>
                       <a:prstDash val="solid"/>
                     </a:lnL>
                     <a:lnR w="9525" cap="flat" cmpd="sng" algn="ctr">
                       <a:solidFill>
-                        <a:srgbClr val="D3E3EE"/>
+                        <a:srgbClr val="D4E8F7"/>
                       </a:solidFill>
                       <a:prstDash val="solid"/>
                     </a:lnR>
                     <a:lnT w="9525" cap="flat" cmpd="sng" algn="ctr">
                       <a:solidFill>
-                        <a:srgbClr val="D3E3EE"/>
+                        <a:srgbClr val="D4E8F7"/>
                       </a:solidFill>
                       <a:prstDash val="solid"/>
                     </a:lnT>
                     <a:lnB w="9525" cap="flat" cmpd="sng" algn="ctr">
                       <a:solidFill>
-                        <a:srgbClr val="D3E3EE"/>
+                        <a:srgbClr val="D4E8F7"/>
                       </a:solidFill>
                       <a:prstDash val="solid"/>
                     </a:lnB>
                     <a:solidFill>
-                      <a:srgbClr val="D3E3EE"/>
+                      <a:srgbClr val="D4E8F7"/>
                     </a:solidFill>
                   </a:tcPr>
                 </a:tc>
@@ -4174,25 +4174,25 @@
                   <a:tcPr anchor="ctr" marL="73152" marR="73152">
                     <a:lnL w="9525" cap="flat" cmpd="sng" algn="ctr">
                       <a:solidFill>
-                        <a:srgbClr val="D3E3EE"/>
+                        <a:srgbClr val="D4E8F7"/>
                       </a:solidFill>
                       <a:prstDash val="solid"/>
                     </a:lnL>
                     <a:lnR w="9525" cap="flat" cmpd="sng" algn="ctr">
                       <a:solidFill>
-                        <a:srgbClr val="D3E3EE"/>
+                        <a:srgbClr val="D4E8F7"/>
                       </a:solidFill>
                       <a:prstDash val="solid"/>
                     </a:lnR>
                     <a:lnT w="9525" cap="flat" cmpd="sng" algn="ctr">
                       <a:solidFill>
-                        <a:srgbClr val="D3E3EE"/>
+                        <a:srgbClr val="D4E8F7"/>
                       </a:solidFill>
                       <a:prstDash val="solid"/>
                     </a:lnT>
                     <a:lnB w="9525" cap="flat" cmpd="sng" algn="ctr">
                       <a:solidFill>
-                        <a:srgbClr val="D3E3EE"/>
+                        <a:srgbClr val="D4E8F7"/>
                       </a:solidFill>
                       <a:prstDash val="solid"/>
                     </a:lnB>
@@ -4220,7 +4220,7 @@
     <p:bg>
       <p:bgPr>
         <a:solidFill>
-          <a:srgbClr val="F1F5F9"/>
+          <a:srgbClr val="F3F8FC"/>
         </a:solidFill>
         <a:effectLst/>
       </p:bgPr>
@@ -4247,7 +4247,7 @@
             <a:avLst/>
           </a:prstGeom>
           <a:solidFill>
-            <a:srgbClr val="497DA2"/>
+            <a:srgbClr val="5196C8"/>
           </a:solidFill>
           <a:ln>
             <a:noFill/>
@@ -4276,7 +4276,7 @@
             <a:avLst/>
           </a:prstGeom>
           <a:solidFill>
-            <a:srgbClr val="8D3F46"/>
+            <a:srgbClr val="339941"/>
           </a:solidFill>
           <a:ln>
             <a:noFill/>
@@ -4320,7 +4320,7 @@
             <a:r>
               <a:rPr sz="3000" b="1" i="0">
                 <a:solidFill>
-                  <a:srgbClr val="29465B"/>
+                  <a:srgbClr val="224E6D"/>
                 </a:solidFill>
               </a:rPr>
               <a:t>한 해 성장 기록</a:t>
@@ -4343,7 +4343,7 @@
             <a:avLst/>
           </a:prstGeom>
           <a:solidFill>
-            <a:srgbClr val="D3E3EE"/>
+            <a:srgbClr val="D4E8F7"/>
           </a:solidFill>
           <a:ln>
             <a:noFill/>
@@ -4372,7 +4372,7 @@
             <a:avLst/>
           </a:prstGeom>
           <a:solidFill>
-            <a:srgbClr val="497DA2"/>
+            <a:srgbClr val="5196C8"/>
           </a:solidFill>
           <a:ln w="38100">
             <a:solidFill>
@@ -4418,7 +4418,7 @@
             <a:r>
               <a:rPr sz="1400" b="1" i="0">
                 <a:solidFill>
-                  <a:srgbClr val="497DA2"/>
+                  <a:srgbClr val="5196C8"/>
                 </a:solidFill>
               </a:rPr>
               <a:t>1개월</a:t>
@@ -4456,7 +4456,7 @@
             <a:r>
               <a:rPr sz="1600" b="1" i="0">
                 <a:solidFill>
-                  <a:srgbClr val="29465B"/>
+                  <a:srgbClr val="224E6D"/>
                 </a:solidFill>
               </a:rPr>
               <a:t>처음 눈을 맞춘 날</a:t>
@@ -4517,7 +4517,7 @@
             <a:avLst/>
           </a:prstGeom>
           <a:solidFill>
-            <a:srgbClr val="497DA2"/>
+            <a:srgbClr val="5196C8"/>
           </a:solidFill>
           <a:ln w="38100">
             <a:solidFill>
@@ -4563,7 +4563,7 @@
             <a:r>
               <a:rPr sz="1400" b="1" i="0">
                 <a:solidFill>
-                  <a:srgbClr val="497DA2"/>
+                  <a:srgbClr val="5196C8"/>
                 </a:solidFill>
               </a:rPr>
               <a:t>3개월</a:t>
@@ -4601,7 +4601,7 @@
             <a:r>
               <a:rPr sz="1600" b="1" i="0">
                 <a:solidFill>
-                  <a:srgbClr val="29465B"/>
+                  <a:srgbClr val="224E6D"/>
                 </a:solidFill>
               </a:rPr>
               <a:t>처음 웃은 날</a:t>
@@ -4662,7 +4662,7 @@
             <a:avLst/>
           </a:prstGeom>
           <a:solidFill>
-            <a:srgbClr val="497DA2"/>
+            <a:srgbClr val="5196C8"/>
           </a:solidFill>
           <a:ln w="38100">
             <a:solidFill>
@@ -4708,7 +4708,7 @@
             <a:r>
               <a:rPr sz="1400" b="1" i="0">
                 <a:solidFill>
-                  <a:srgbClr val="497DA2"/>
+                  <a:srgbClr val="5196C8"/>
                 </a:solidFill>
               </a:rPr>
               <a:t>6개월</a:t>
@@ -4746,7 +4746,7 @@
             <a:r>
               <a:rPr sz="1600" b="1" i="0">
                 <a:solidFill>
-                  <a:srgbClr val="29465B"/>
+                  <a:srgbClr val="224E6D"/>
                 </a:solidFill>
               </a:rPr>
               <a:t>뒤집기 성공</a:t>
@@ -4807,7 +4807,7 @@
             <a:avLst/>
           </a:prstGeom>
           <a:solidFill>
-            <a:srgbClr val="497DA2"/>
+            <a:srgbClr val="5196C8"/>
           </a:solidFill>
           <a:ln w="38100">
             <a:solidFill>
@@ -4853,7 +4853,7 @@
             <a:r>
               <a:rPr sz="1400" b="1" i="0">
                 <a:solidFill>
-                  <a:srgbClr val="497DA2"/>
+                  <a:srgbClr val="5196C8"/>
                 </a:solidFill>
               </a:rPr>
               <a:t>9개월</a:t>
@@ -4891,7 +4891,7 @@
             <a:r>
               <a:rPr sz="1600" b="1" i="0">
                 <a:solidFill>
-                  <a:srgbClr val="29465B"/>
+                  <a:srgbClr val="224E6D"/>
                 </a:solidFill>
               </a:rPr>
               <a:t>첫 이유식</a:t>
@@ -4952,7 +4952,7 @@
             <a:avLst/>
           </a:prstGeom>
           <a:solidFill>
-            <a:srgbClr val="497DA2"/>
+            <a:srgbClr val="5196C8"/>
           </a:solidFill>
           <a:ln w="38100">
             <a:solidFill>
@@ -4998,7 +4998,7 @@
             <a:r>
               <a:rPr sz="1400" b="1" i="0">
                 <a:solidFill>
-                  <a:srgbClr val="497DA2"/>
+                  <a:srgbClr val="5196C8"/>
                 </a:solidFill>
               </a:rPr>
               <a:t>12개월</a:t>
@@ -5036,7 +5036,7 @@
             <a:r>
               <a:rPr sz="1600" b="1" i="0">
                 <a:solidFill>
-                  <a:srgbClr val="29465B"/>
+                  <a:srgbClr val="224E6D"/>
                 </a:solidFill>
               </a:rPr>
               <a:t>첫 걸음</a:t>
@@ -5096,7 +5096,7 @@
     <p:bg>
       <p:bgPr>
         <a:solidFill>
-          <a:srgbClr val="F1F5F9"/>
+          <a:srgbClr val="F3F8FC"/>
         </a:solidFill>
         <a:effectLst/>
       </p:bgPr>
@@ -5123,7 +5123,7 @@
             <a:avLst/>
           </a:prstGeom>
           <a:solidFill>
-            <a:srgbClr val="497DA2"/>
+            <a:srgbClr val="5196C8"/>
           </a:solidFill>
           <a:ln>
             <a:noFill/>
@@ -5152,7 +5152,7 @@
             <a:avLst/>
           </a:prstGeom>
           <a:solidFill>
-            <a:srgbClr val="8D3F46"/>
+            <a:srgbClr val="339941"/>
           </a:solidFill>
           <a:ln>
             <a:noFill/>
@@ -5196,7 +5196,7 @@
             <a:r>
               <a:rPr sz="3000" b="1" i="0">
                 <a:solidFill>
-                  <a:srgbClr val="29465B"/>
+                  <a:srgbClr val="224E6D"/>
                 </a:solidFill>
               </a:rPr>
               <a:t>키와 몸무게</a:t>
@@ -5249,30 +5249,30 @@
                   <a:tcPr anchor="ctr" marL="73152" marR="73152">
                     <a:lnL w="9525" cap="flat" cmpd="sng" algn="ctr">
                       <a:solidFill>
-                        <a:srgbClr val="497DA2"/>
+                        <a:srgbClr val="5196C8"/>
                       </a:solidFill>
                       <a:prstDash val="solid"/>
                     </a:lnL>
                     <a:lnR w="9525" cap="flat" cmpd="sng" algn="ctr">
                       <a:solidFill>
-                        <a:srgbClr val="497DA2"/>
+                        <a:srgbClr val="5196C8"/>
                       </a:solidFill>
                       <a:prstDash val="solid"/>
                     </a:lnR>
                     <a:lnT w="9525" cap="flat" cmpd="sng" algn="ctr">
                       <a:solidFill>
-                        <a:srgbClr val="497DA2"/>
+                        <a:srgbClr val="5196C8"/>
                       </a:solidFill>
                       <a:prstDash val="solid"/>
                     </a:lnT>
                     <a:lnB w="9525" cap="flat" cmpd="sng" algn="ctr">
                       <a:solidFill>
-                        <a:srgbClr val="497DA2"/>
+                        <a:srgbClr val="5196C8"/>
                       </a:solidFill>
                       <a:prstDash val="solid"/>
                     </a:lnB>
                     <a:solidFill>
-                      <a:srgbClr val="497DA2"/>
+                      <a:srgbClr val="5196C8"/>
                     </a:solidFill>
                   </a:tcPr>
                 </a:tc>
@@ -5295,30 +5295,30 @@
                   <a:tcPr anchor="ctr" marL="73152" marR="73152">
                     <a:lnL w="9525" cap="flat" cmpd="sng" algn="ctr">
                       <a:solidFill>
-                        <a:srgbClr val="497DA2"/>
+                        <a:srgbClr val="5196C8"/>
                       </a:solidFill>
                       <a:prstDash val="solid"/>
                     </a:lnL>
                     <a:lnR w="9525" cap="flat" cmpd="sng" algn="ctr">
                       <a:solidFill>
-                        <a:srgbClr val="497DA2"/>
+                        <a:srgbClr val="5196C8"/>
                       </a:solidFill>
                       <a:prstDash val="solid"/>
                     </a:lnR>
                     <a:lnT w="9525" cap="flat" cmpd="sng" algn="ctr">
                       <a:solidFill>
-                        <a:srgbClr val="497DA2"/>
+                        <a:srgbClr val="5196C8"/>
                       </a:solidFill>
                       <a:prstDash val="solid"/>
                     </a:lnT>
                     <a:lnB w="9525" cap="flat" cmpd="sng" algn="ctr">
                       <a:solidFill>
-                        <a:srgbClr val="497DA2"/>
+                        <a:srgbClr val="5196C8"/>
                       </a:solidFill>
                       <a:prstDash val="solid"/>
                     </a:lnB>
                     <a:solidFill>
-                      <a:srgbClr val="497DA2"/>
+                      <a:srgbClr val="5196C8"/>
                     </a:solidFill>
                   </a:tcPr>
                 </a:tc>
@@ -5341,30 +5341,30 @@
                   <a:tcPr anchor="ctr" marL="73152" marR="73152">
                     <a:lnL w="9525" cap="flat" cmpd="sng" algn="ctr">
                       <a:solidFill>
-                        <a:srgbClr val="497DA2"/>
+                        <a:srgbClr val="5196C8"/>
                       </a:solidFill>
                       <a:prstDash val="solid"/>
                     </a:lnL>
                     <a:lnR w="9525" cap="flat" cmpd="sng" algn="ctr">
                       <a:solidFill>
-                        <a:srgbClr val="497DA2"/>
+                        <a:srgbClr val="5196C8"/>
                       </a:solidFill>
                       <a:prstDash val="solid"/>
                     </a:lnR>
                     <a:lnT w="9525" cap="flat" cmpd="sng" algn="ctr">
                       <a:solidFill>
-                        <a:srgbClr val="497DA2"/>
+                        <a:srgbClr val="5196C8"/>
                       </a:solidFill>
                       <a:prstDash val="solid"/>
                     </a:lnT>
                     <a:lnB w="9525" cap="flat" cmpd="sng" algn="ctr">
                       <a:solidFill>
-                        <a:srgbClr val="497DA2"/>
+                        <a:srgbClr val="5196C8"/>
                       </a:solidFill>
                       <a:prstDash val="solid"/>
                     </a:lnB>
                     <a:solidFill>
-                      <a:srgbClr val="497DA2"/>
+                      <a:srgbClr val="5196C8"/>
                     </a:solidFill>
                   </a:tcPr>
                 </a:tc>
@@ -5387,30 +5387,30 @@
                   <a:tcPr anchor="ctr" marL="73152" marR="73152">
                     <a:lnL w="9525" cap="flat" cmpd="sng" algn="ctr">
                       <a:solidFill>
-                        <a:srgbClr val="497DA2"/>
+                        <a:srgbClr val="5196C8"/>
                       </a:solidFill>
                       <a:prstDash val="solid"/>
                     </a:lnL>
                     <a:lnR w="9525" cap="flat" cmpd="sng" algn="ctr">
                       <a:solidFill>
-                        <a:srgbClr val="497DA2"/>
+                        <a:srgbClr val="5196C8"/>
                       </a:solidFill>
                       <a:prstDash val="solid"/>
                     </a:lnR>
                     <a:lnT w="9525" cap="flat" cmpd="sng" algn="ctr">
                       <a:solidFill>
-                        <a:srgbClr val="497DA2"/>
+                        <a:srgbClr val="5196C8"/>
                       </a:solidFill>
                       <a:prstDash val="solid"/>
                     </a:lnT>
                     <a:lnB w="9525" cap="flat" cmpd="sng" algn="ctr">
                       <a:solidFill>
-                        <a:srgbClr val="497DA2"/>
+                        <a:srgbClr val="5196C8"/>
                       </a:solidFill>
                       <a:prstDash val="solid"/>
                     </a:lnB>
                     <a:solidFill>
-                      <a:srgbClr val="497DA2"/>
+                      <a:srgbClr val="5196C8"/>
                     </a:solidFill>
                   </a:tcPr>
                 </a:tc>
@@ -5433,30 +5433,30 @@
                   <a:tcPr anchor="ctr" marL="73152" marR="73152">
                     <a:lnL w="9525" cap="flat" cmpd="sng" algn="ctr">
                       <a:solidFill>
-                        <a:srgbClr val="497DA2"/>
+                        <a:srgbClr val="5196C8"/>
                       </a:solidFill>
                       <a:prstDash val="solid"/>
                     </a:lnL>
                     <a:lnR w="9525" cap="flat" cmpd="sng" algn="ctr">
                       <a:solidFill>
-                        <a:srgbClr val="497DA2"/>
+                        <a:srgbClr val="5196C8"/>
                       </a:solidFill>
                       <a:prstDash val="solid"/>
                     </a:lnR>
                     <a:lnT w="9525" cap="flat" cmpd="sng" algn="ctr">
                       <a:solidFill>
-                        <a:srgbClr val="497DA2"/>
+                        <a:srgbClr val="5196C8"/>
                       </a:solidFill>
                       <a:prstDash val="solid"/>
                     </a:lnT>
                     <a:lnB w="9525" cap="flat" cmpd="sng" algn="ctr">
                       <a:solidFill>
-                        <a:srgbClr val="497DA2"/>
+                        <a:srgbClr val="5196C8"/>
                       </a:solidFill>
                       <a:prstDash val="solid"/>
                     </a:lnB>
                     <a:solidFill>
-                      <a:srgbClr val="497DA2"/>
+                      <a:srgbClr val="5196C8"/>
                     </a:solidFill>
                   </a:tcPr>
                 </a:tc>
@@ -5471,7 +5471,7 @@
                       <a:r>
                         <a:rPr sz="1600" b="1">
                           <a:solidFill>
-                            <a:srgbClr val="29465B"/>
+                            <a:srgbClr val="224E6D"/>
                           </a:solidFill>
                         </a:rPr>
                         <a:t>키(cm)</a:t>
@@ -5481,30 +5481,30 @@
                   <a:tcPr anchor="ctr" marL="73152" marR="73152">
                     <a:lnL w="9525" cap="flat" cmpd="sng" algn="ctr">
                       <a:solidFill>
-                        <a:srgbClr val="D3E3EE"/>
+                        <a:srgbClr val="D4E8F7"/>
                       </a:solidFill>
                       <a:prstDash val="solid"/>
                     </a:lnL>
                     <a:lnR w="9525" cap="flat" cmpd="sng" algn="ctr">
                       <a:solidFill>
-                        <a:srgbClr val="D3E3EE"/>
+                        <a:srgbClr val="D4E8F7"/>
                       </a:solidFill>
                       <a:prstDash val="solid"/>
                     </a:lnR>
                     <a:lnT w="9525" cap="flat" cmpd="sng" algn="ctr">
                       <a:solidFill>
-                        <a:srgbClr val="D3E3EE"/>
+                        <a:srgbClr val="D4E8F7"/>
                       </a:solidFill>
                       <a:prstDash val="solid"/>
                     </a:lnT>
                     <a:lnB w="9525" cap="flat" cmpd="sng" algn="ctr">
                       <a:solidFill>
-                        <a:srgbClr val="D3E3EE"/>
+                        <a:srgbClr val="D4E8F7"/>
                       </a:solidFill>
                       <a:prstDash val="solid"/>
                     </a:lnB>
                     <a:solidFill>
-                      <a:srgbClr val="D3E3EE"/>
+                      <a:srgbClr val="D4E8F7"/>
                     </a:solidFill>
                   </a:tcPr>
                 </a:tc>
@@ -5527,25 +5527,25 @@
                   <a:tcPr anchor="ctr" marL="73152" marR="73152">
                     <a:lnL w="9525" cap="flat" cmpd="sng" algn="ctr">
                       <a:solidFill>
-                        <a:srgbClr val="D3E3EE"/>
+                        <a:srgbClr val="D4E8F7"/>
                       </a:solidFill>
                       <a:prstDash val="solid"/>
                     </a:lnL>
                     <a:lnR w="9525" cap="flat" cmpd="sng" algn="ctr">
                       <a:solidFill>
-                        <a:srgbClr val="D3E3EE"/>
+                        <a:srgbClr val="D4E8F7"/>
                       </a:solidFill>
                       <a:prstDash val="solid"/>
                     </a:lnR>
                     <a:lnT w="9525" cap="flat" cmpd="sng" algn="ctr">
                       <a:solidFill>
-                        <a:srgbClr val="D3E3EE"/>
+                        <a:srgbClr val="D4E8F7"/>
                       </a:solidFill>
                       <a:prstDash val="solid"/>
                     </a:lnT>
                     <a:lnB w="9525" cap="flat" cmpd="sng" algn="ctr">
                       <a:solidFill>
-                        <a:srgbClr val="D3E3EE"/>
+                        <a:srgbClr val="D4E8F7"/>
                       </a:solidFill>
                       <a:prstDash val="solid"/>
                     </a:lnB>
@@ -5573,25 +5573,25 @@
                   <a:tcPr anchor="ctr" marL="73152" marR="73152">
                     <a:lnL w="9525" cap="flat" cmpd="sng" algn="ctr">
                       <a:solidFill>
-                        <a:srgbClr val="D3E3EE"/>
+                        <a:srgbClr val="D4E8F7"/>
                       </a:solidFill>
                       <a:prstDash val="solid"/>
                     </a:lnL>
                     <a:lnR w="9525" cap="flat" cmpd="sng" algn="ctr">
                       <a:solidFill>
-                        <a:srgbClr val="D3E3EE"/>
+                        <a:srgbClr val="D4E8F7"/>
                       </a:solidFill>
                       <a:prstDash val="solid"/>
                     </a:lnR>
                     <a:lnT w="9525" cap="flat" cmpd="sng" algn="ctr">
                       <a:solidFill>
-                        <a:srgbClr val="D3E3EE"/>
+                        <a:srgbClr val="D4E8F7"/>
                       </a:solidFill>
                       <a:prstDash val="solid"/>
                     </a:lnT>
                     <a:lnB w="9525" cap="flat" cmpd="sng" algn="ctr">
                       <a:solidFill>
-                        <a:srgbClr val="D3E3EE"/>
+                        <a:srgbClr val="D4E8F7"/>
                       </a:solidFill>
                       <a:prstDash val="solid"/>
                     </a:lnB>
@@ -5619,25 +5619,25 @@
                   <a:tcPr anchor="ctr" marL="73152" marR="73152">
                     <a:lnL w="9525" cap="flat" cmpd="sng" algn="ctr">
                       <a:solidFill>
-                        <a:srgbClr val="D3E3EE"/>
+                        <a:srgbClr val="D4E8F7"/>
                       </a:solidFill>
                       <a:prstDash val="solid"/>
                     </a:lnL>
                     <a:lnR w="9525" cap="flat" cmpd="sng" algn="ctr">
                       <a:solidFill>
-                        <a:srgbClr val="D3E3EE"/>
+                        <a:srgbClr val="D4E8F7"/>
                       </a:solidFill>
                       <a:prstDash val="solid"/>
                     </a:lnR>
                     <a:lnT w="9525" cap="flat" cmpd="sng" algn="ctr">
                       <a:solidFill>
-                        <a:srgbClr val="D3E3EE"/>
+                        <a:srgbClr val="D4E8F7"/>
                       </a:solidFill>
                       <a:prstDash val="solid"/>
                     </a:lnT>
                     <a:lnB w="9525" cap="flat" cmpd="sng" algn="ctr">
                       <a:solidFill>
-                        <a:srgbClr val="D3E3EE"/>
+                        <a:srgbClr val="D4E8F7"/>
                       </a:solidFill>
                       <a:prstDash val="solid"/>
                     </a:lnB>
@@ -5665,25 +5665,25 @@
                   <a:tcPr anchor="ctr" marL="73152" marR="73152">
                     <a:lnL w="9525" cap="flat" cmpd="sng" algn="ctr">
                       <a:solidFill>
-                        <a:srgbClr val="D3E3EE"/>
+                        <a:srgbClr val="D4E8F7"/>
                       </a:solidFill>
                       <a:prstDash val="solid"/>
                     </a:lnL>
                     <a:lnR w="9525" cap="flat" cmpd="sng" algn="ctr">
                       <a:solidFill>
-                        <a:srgbClr val="D3E3EE"/>
+                        <a:srgbClr val="D4E8F7"/>
                       </a:solidFill>
                       <a:prstDash val="solid"/>
                     </a:lnR>
                     <a:lnT w="9525" cap="flat" cmpd="sng" algn="ctr">
                       <a:solidFill>
-                        <a:srgbClr val="D3E3EE"/>
+                        <a:srgbClr val="D4E8F7"/>
                       </a:solidFill>
                       <a:prstDash val="solid"/>
                     </a:lnT>
                     <a:lnB w="9525" cap="flat" cmpd="sng" algn="ctr">
                       <a:solidFill>
-                        <a:srgbClr val="D3E3EE"/>
+                        <a:srgbClr val="D4E8F7"/>
                       </a:solidFill>
                       <a:prstDash val="solid"/>
                     </a:lnB>
@@ -5703,7 +5703,7 @@
                       <a:r>
                         <a:rPr sz="1600" b="1">
                           <a:solidFill>
-                            <a:srgbClr val="29465B"/>
+                            <a:srgbClr val="224E6D"/>
                           </a:solidFill>
                         </a:rPr>
                         <a:t>몸무게(kg)</a:t>
@@ -5713,30 +5713,30 @@
                   <a:tcPr anchor="ctr" marL="73152" marR="73152">
                     <a:lnL w="9525" cap="flat" cmpd="sng" algn="ctr">
                       <a:solidFill>
-                        <a:srgbClr val="D3E3EE"/>
+                        <a:srgbClr val="D4E8F7"/>
                       </a:solidFill>
                       <a:prstDash val="solid"/>
                     </a:lnL>
                     <a:lnR w="9525" cap="flat" cmpd="sng" algn="ctr">
                       <a:solidFill>
-                        <a:srgbClr val="D3E3EE"/>
+                        <a:srgbClr val="D4E8F7"/>
                       </a:solidFill>
                       <a:prstDash val="solid"/>
                     </a:lnR>
                     <a:lnT w="9525" cap="flat" cmpd="sng" algn="ctr">
                       <a:solidFill>
-                        <a:srgbClr val="D3E3EE"/>
+                        <a:srgbClr val="D4E8F7"/>
                       </a:solidFill>
                       <a:prstDash val="solid"/>
                     </a:lnT>
                     <a:lnB w="9525" cap="flat" cmpd="sng" algn="ctr">
                       <a:solidFill>
-                        <a:srgbClr val="D3E3EE"/>
+                        <a:srgbClr val="D4E8F7"/>
                       </a:solidFill>
                       <a:prstDash val="solid"/>
                     </a:lnB>
                     <a:solidFill>
-                      <a:srgbClr val="D3E3EE"/>
+                      <a:srgbClr val="D4E8F7"/>
                     </a:solidFill>
                   </a:tcPr>
                 </a:tc>
@@ -5759,30 +5759,30 @@
                   <a:tcPr anchor="ctr" marL="73152" marR="73152">
                     <a:lnL w="9525" cap="flat" cmpd="sng" algn="ctr">
                       <a:solidFill>
-                        <a:srgbClr val="D3E3EE"/>
+                        <a:srgbClr val="D4E8F7"/>
                       </a:solidFill>
                       <a:prstDash val="solid"/>
                     </a:lnL>
                     <a:lnR w="9525" cap="flat" cmpd="sng" algn="ctr">
                       <a:solidFill>
-                        <a:srgbClr val="D3E3EE"/>
+                        <a:srgbClr val="D4E8F7"/>
                       </a:solidFill>
                       <a:prstDash val="solid"/>
                     </a:lnR>
                     <a:lnT w="9525" cap="flat" cmpd="sng" algn="ctr">
                       <a:solidFill>
-                        <a:srgbClr val="D3E3EE"/>
+                        <a:srgbClr val="D4E8F7"/>
                       </a:solidFill>
                       <a:prstDash val="solid"/>
                     </a:lnT>
                     <a:lnB w="9525" cap="flat" cmpd="sng" algn="ctr">
                       <a:solidFill>
-                        <a:srgbClr val="D3E3EE"/>
+                        <a:srgbClr val="D4E8F7"/>
                       </a:solidFill>
                       <a:prstDash val="solid"/>
                     </a:lnB>
                     <a:solidFill>
-                      <a:srgbClr val="F1F5F9"/>
+                      <a:srgbClr val="F3F8FC"/>
                     </a:solidFill>
                   </a:tcPr>
                 </a:tc>
@@ -5805,30 +5805,30 @@
                   <a:tcPr anchor="ctr" marL="73152" marR="73152">
                     <a:lnL w="9525" cap="flat" cmpd="sng" algn="ctr">
                       <a:solidFill>
-                        <a:srgbClr val="D3E3EE"/>
+                        <a:srgbClr val="D4E8F7"/>
                       </a:solidFill>
                       <a:prstDash val="solid"/>
                     </a:lnL>
                     <a:lnR w="9525" cap="flat" cmpd="sng" algn="ctr">
                       <a:solidFill>
-                        <a:srgbClr val="D3E3EE"/>
+                        <a:srgbClr val="D4E8F7"/>
                       </a:solidFill>
                       <a:prstDash val="solid"/>
                     </a:lnR>
                     <a:lnT w="9525" cap="flat" cmpd="sng" algn="ctr">
                       <a:solidFill>
-                        <a:srgbClr val="D3E3EE"/>
+                        <a:srgbClr val="D4E8F7"/>
                       </a:solidFill>
                       <a:prstDash val="solid"/>
                     </a:lnT>
                     <a:lnB w="9525" cap="flat" cmpd="sng" algn="ctr">
                       <a:solidFill>
-                        <a:srgbClr val="D3E3EE"/>
+                        <a:srgbClr val="D4E8F7"/>
                       </a:solidFill>
                       <a:prstDash val="solid"/>
                     </a:lnB>
                     <a:solidFill>
-                      <a:srgbClr val="F1F5F9"/>
+                      <a:srgbClr val="F3F8FC"/>
                     </a:solidFill>
                   </a:tcPr>
                 </a:tc>
@@ -5851,30 +5851,30 @@
                   <a:tcPr anchor="ctr" marL="73152" marR="73152">
                     <a:lnL w="9525" cap="flat" cmpd="sng" algn="ctr">
                       <a:solidFill>
-                        <a:srgbClr val="D3E3EE"/>
+                        <a:srgbClr val="D4E8F7"/>
                       </a:solidFill>
                       <a:prstDash val="solid"/>
                     </a:lnL>
                     <a:lnR w="9525" cap="flat" cmpd="sng" algn="ctr">
                       <a:solidFill>
-                        <a:srgbClr val="D3E3EE"/>
+                        <a:srgbClr val="D4E8F7"/>
                       </a:solidFill>
                       <a:prstDash val="solid"/>
                     </a:lnR>
                     <a:lnT w="9525" cap="flat" cmpd="sng" algn="ctr">
                       <a:solidFill>
-                        <a:srgbClr val="D3E3EE"/>
+                        <a:srgbClr val="D4E8F7"/>
                       </a:solidFill>
                       <a:prstDash val="solid"/>
                     </a:lnT>
                     <a:lnB w="9525" cap="flat" cmpd="sng" algn="ctr">
                       <a:solidFill>
-                        <a:srgbClr val="D3E3EE"/>
+                        <a:srgbClr val="D4E8F7"/>
                       </a:solidFill>
                       <a:prstDash val="solid"/>
                     </a:lnB>
                     <a:solidFill>
-                      <a:srgbClr val="F1F5F9"/>
+                      <a:srgbClr val="F3F8FC"/>
                     </a:solidFill>
                   </a:tcPr>
                 </a:tc>
@@ -5897,30 +5897,30 @@
                   <a:tcPr anchor="ctr" marL="73152" marR="73152">
                     <a:lnL w="9525" cap="flat" cmpd="sng" algn="ctr">
                       <a:solidFill>
-                        <a:srgbClr val="D3E3EE"/>
+                        <a:srgbClr val="D4E8F7"/>
                       </a:solidFill>
                       <a:prstDash val="solid"/>
                     </a:lnL>
                     <a:lnR w="9525" cap="flat" cmpd="sng" algn="ctr">
                       <a:solidFill>
-                        <a:srgbClr val="D3E3EE"/>
+                        <a:srgbClr val="D4E8F7"/>
                       </a:solidFill>
                       <a:prstDash val="solid"/>
                     </a:lnR>
                     <a:lnT w="9525" cap="flat" cmpd="sng" algn="ctr">
                       <a:solidFill>
-                        <a:srgbClr val="D3E3EE"/>
+                        <a:srgbClr val="D4E8F7"/>
                       </a:solidFill>
                       <a:prstDash val="solid"/>
                     </a:lnT>
                     <a:lnB w="9525" cap="flat" cmpd="sng" algn="ctr">
                       <a:solidFill>
-                        <a:srgbClr val="D3E3EE"/>
+                        <a:srgbClr val="D4E8F7"/>
                       </a:solidFill>
                       <a:prstDash val="solid"/>
                     </a:lnB>
                     <a:solidFill>
-                      <a:srgbClr val="F1F5F9"/>
+                      <a:srgbClr val="F3F8FC"/>
                     </a:solidFill>
                   </a:tcPr>
                 </a:tc>
@@ -5935,7 +5935,7 @@
                       <a:r>
                         <a:rPr sz="1600" b="1">
                           <a:solidFill>
-                            <a:srgbClr val="29465B"/>
+                            <a:srgbClr val="224E6D"/>
                           </a:solidFill>
                         </a:rPr>
                         <a:t>새로 한 것</a:t>
@@ -5945,30 +5945,30 @@
                   <a:tcPr anchor="ctr" marL="73152" marR="73152">
                     <a:lnL w="9525" cap="flat" cmpd="sng" algn="ctr">
                       <a:solidFill>
-                        <a:srgbClr val="D3E3EE"/>
+                        <a:srgbClr val="D4E8F7"/>
                       </a:solidFill>
                       <a:prstDash val="solid"/>
                     </a:lnL>
                     <a:lnR w="9525" cap="flat" cmpd="sng" algn="ctr">
                       <a:solidFill>
-                        <a:srgbClr val="D3E3EE"/>
+                        <a:srgbClr val="D4E8F7"/>
                       </a:solidFill>
                       <a:prstDash val="solid"/>
                     </a:lnR>
                     <a:lnT w="9525" cap="flat" cmpd="sng" algn="ctr">
                       <a:solidFill>
-                        <a:srgbClr val="D3E3EE"/>
+                        <a:srgbClr val="D4E8F7"/>
                       </a:solidFill>
                       <a:prstDash val="solid"/>
                     </a:lnT>
                     <a:lnB w="9525" cap="flat" cmpd="sng" algn="ctr">
                       <a:solidFill>
-                        <a:srgbClr val="D3E3EE"/>
+                        <a:srgbClr val="D4E8F7"/>
                       </a:solidFill>
                       <a:prstDash val="solid"/>
                     </a:lnB>
                     <a:solidFill>
-                      <a:srgbClr val="D3E3EE"/>
+                      <a:srgbClr val="D4E8F7"/>
                     </a:solidFill>
                   </a:tcPr>
                 </a:tc>
@@ -5991,25 +5991,25 @@
                   <a:tcPr anchor="ctr" marL="73152" marR="73152">
                     <a:lnL w="9525" cap="flat" cmpd="sng" algn="ctr">
                       <a:solidFill>
-                        <a:srgbClr val="D3E3EE"/>
+                        <a:srgbClr val="D4E8F7"/>
                       </a:solidFill>
                       <a:prstDash val="solid"/>
                     </a:lnL>
                     <a:lnR w="9525" cap="flat" cmpd="sng" algn="ctr">
                       <a:solidFill>
-                        <a:srgbClr val="D3E3EE"/>
+                        <a:srgbClr val="D4E8F7"/>
                       </a:solidFill>
                       <a:prstDash val="solid"/>
                     </a:lnR>
                     <a:lnT w="9525" cap="flat" cmpd="sng" algn="ctr">
                       <a:solidFill>
-                        <a:srgbClr val="D3E3EE"/>
+                        <a:srgbClr val="D4E8F7"/>
                       </a:solidFill>
                       <a:prstDash val="solid"/>
                     </a:lnT>
                     <a:lnB w="9525" cap="flat" cmpd="sng" algn="ctr">
                       <a:solidFill>
-                        <a:srgbClr val="D3E3EE"/>
+                        <a:srgbClr val="D4E8F7"/>
                       </a:solidFill>
                       <a:prstDash val="solid"/>
                     </a:lnB>
@@ -6037,25 +6037,25 @@
                   <a:tcPr anchor="ctr" marL="73152" marR="73152">
                     <a:lnL w="9525" cap="flat" cmpd="sng" algn="ctr">
                       <a:solidFill>
-                        <a:srgbClr val="D3E3EE"/>
+                        <a:srgbClr val="D4E8F7"/>
                       </a:solidFill>
                       <a:prstDash val="solid"/>
                     </a:lnL>
                     <a:lnR w="9525" cap="flat" cmpd="sng" algn="ctr">
                       <a:solidFill>
-                        <a:srgbClr val="D3E3EE"/>
+                        <a:srgbClr val="D4E8F7"/>
                       </a:solidFill>
                       <a:prstDash val="solid"/>
                     </a:lnR>
                     <a:lnT w="9525" cap="flat" cmpd="sng" algn="ctr">
                       <a:solidFill>
-                        <a:srgbClr val="D3E3EE"/>
+                        <a:srgbClr val="D4E8F7"/>
                       </a:solidFill>
                       <a:prstDash val="solid"/>
                     </a:lnT>
                     <a:lnB w="9525" cap="flat" cmpd="sng" algn="ctr">
                       <a:solidFill>
-                        <a:srgbClr val="D3E3EE"/>
+                        <a:srgbClr val="D4E8F7"/>
                       </a:solidFill>
                       <a:prstDash val="solid"/>
                     </a:lnB>
@@ -6083,25 +6083,25 @@
                   <a:tcPr anchor="ctr" marL="73152" marR="73152">
                     <a:lnL w="9525" cap="flat" cmpd="sng" algn="ctr">
                       <a:solidFill>
-                        <a:srgbClr val="D3E3EE"/>
+                        <a:srgbClr val="D4E8F7"/>
                       </a:solidFill>
                       <a:prstDash val="solid"/>
                     </a:lnL>
                     <a:lnR w="9525" cap="flat" cmpd="sng" algn="ctr">
                       <a:solidFill>
-                        <a:srgbClr val="D3E3EE"/>
+                        <a:srgbClr val="D4E8F7"/>
                       </a:solidFill>
                       <a:prstDash val="solid"/>
                     </a:lnR>
                     <a:lnT w="9525" cap="flat" cmpd="sng" algn="ctr">
                       <a:solidFill>
-                        <a:srgbClr val="D3E3EE"/>
+                        <a:srgbClr val="D4E8F7"/>
                       </a:solidFill>
                       <a:prstDash val="solid"/>
                     </a:lnT>
                     <a:lnB w="9525" cap="flat" cmpd="sng" algn="ctr">
                       <a:solidFill>
-                        <a:srgbClr val="D3E3EE"/>
+                        <a:srgbClr val="D4E8F7"/>
                       </a:solidFill>
                       <a:prstDash val="solid"/>
                     </a:lnB>
@@ -6129,25 +6129,25 @@
                   <a:tcPr anchor="ctr" marL="73152" marR="73152">
                     <a:lnL w="9525" cap="flat" cmpd="sng" algn="ctr">
                       <a:solidFill>
-                        <a:srgbClr val="D3E3EE"/>
+                        <a:srgbClr val="D4E8F7"/>
                       </a:solidFill>
                       <a:prstDash val="solid"/>
                     </a:lnL>
                     <a:lnR w="9525" cap="flat" cmpd="sng" algn="ctr">
                       <a:solidFill>
-                        <a:srgbClr val="D3E3EE"/>
+                        <a:srgbClr val="D4E8F7"/>
                       </a:solidFill>
                       <a:prstDash val="solid"/>
                     </a:lnR>
                     <a:lnT w="9525" cap="flat" cmpd="sng" algn="ctr">
                       <a:solidFill>
-                        <a:srgbClr val="D3E3EE"/>
+                        <a:srgbClr val="D4E8F7"/>
                       </a:solidFill>
                       <a:prstDash val="solid"/>
                     </a:lnT>
                     <a:lnB w="9525" cap="flat" cmpd="sng" algn="ctr">
                       <a:solidFill>
-                        <a:srgbClr val="D3E3EE"/>
+                        <a:srgbClr val="D4E8F7"/>
                       </a:solidFill>
                       <a:prstDash val="solid"/>
                     </a:lnB>
@@ -6175,7 +6175,7 @@
     <p:bg>
       <p:bgPr>
         <a:solidFill>
-          <a:srgbClr val="F1F5F9"/>
+          <a:srgbClr val="F3F8FC"/>
         </a:solidFill>
         <a:effectLst/>
       </p:bgPr>
@@ -6202,7 +6202,7 @@
             <a:avLst/>
           </a:prstGeom>
           <a:solidFill>
-            <a:srgbClr val="497DA2"/>
+            <a:srgbClr val="5196C8"/>
           </a:solidFill>
           <a:ln>
             <a:noFill/>
@@ -6231,7 +6231,7 @@
             <a:avLst/>
           </a:prstGeom>
           <a:solidFill>
-            <a:srgbClr val="8D3F46"/>
+            <a:srgbClr val="339941"/>
           </a:solidFill>
           <a:ln>
             <a:noFill/>
@@ -6275,7 +6275,7 @@
             <a:r>
               <a:rPr sz="3000" b="1" i="0">
                 <a:solidFill>
-                  <a:srgbClr val="29465B"/>
+                  <a:srgbClr val="224E6D"/>
                 </a:solidFill>
               </a:rPr>
               <a:t>사진 모음</a:t>
@@ -6300,11 +6300,11 @@
             </a:avLst>
           </a:prstGeom>
           <a:solidFill>
-            <a:srgbClr val="D3E3EE"/>
+            <a:srgbClr val="D4E8F7"/>
           </a:solidFill>
           <a:ln w="19050">
             <a:solidFill>
-              <a:srgbClr val="497DA2"/>
+              <a:srgbClr val="5196C8"/>
             </a:solidFill>
             <a:prstDash val="dash"/>
           </a:ln>
@@ -6323,7 +6323,7 @@
             <a:r>
               <a:rPr sz="1200" b="0" i="0">
                 <a:solidFill>
-                  <a:srgbClr val="29465B"/>
+                  <a:srgbClr val="224E6D"/>
                 </a:solidFill>
               </a:rPr>
               <a:t>사진 1</a:t>
@@ -6348,11 +6348,11 @@
             </a:avLst>
           </a:prstGeom>
           <a:solidFill>
-            <a:srgbClr val="D3E3EE"/>
+            <a:srgbClr val="D4E8F7"/>
           </a:solidFill>
           <a:ln w="19050">
             <a:solidFill>
-              <a:srgbClr val="497DA2"/>
+              <a:srgbClr val="5196C8"/>
             </a:solidFill>
             <a:prstDash val="dash"/>
           </a:ln>
@@ -6371,7 +6371,7 @@
             <a:r>
               <a:rPr sz="1200" b="0" i="0">
                 <a:solidFill>
-                  <a:srgbClr val="29465B"/>
+                  <a:srgbClr val="224E6D"/>
                 </a:solidFill>
               </a:rPr>
               <a:t>사진 2</a:t>
@@ -6396,11 +6396,11 @@
             </a:avLst>
           </a:prstGeom>
           <a:solidFill>
-            <a:srgbClr val="D3E3EE"/>
+            <a:srgbClr val="D4E8F7"/>
           </a:solidFill>
           <a:ln w="19050">
             <a:solidFill>
-              <a:srgbClr val="497DA2"/>
+              <a:srgbClr val="5196C8"/>
             </a:solidFill>
             <a:prstDash val="dash"/>
           </a:ln>
@@ -6419,7 +6419,7 @@
             <a:r>
               <a:rPr sz="1200" b="0" i="0">
                 <a:solidFill>
-                  <a:srgbClr val="29465B"/>
+                  <a:srgbClr val="224E6D"/>
                 </a:solidFill>
               </a:rPr>
               <a:t>사진 3</a:t>
@@ -6444,11 +6444,11 @@
             </a:avLst>
           </a:prstGeom>
           <a:solidFill>
-            <a:srgbClr val="D3E3EE"/>
+            <a:srgbClr val="D4E8F7"/>
           </a:solidFill>
           <a:ln w="19050">
             <a:solidFill>
-              <a:srgbClr val="497DA2"/>
+              <a:srgbClr val="5196C8"/>
             </a:solidFill>
             <a:prstDash val="dash"/>
           </a:ln>
@@ -6467,7 +6467,7 @@
             <a:r>
               <a:rPr sz="1200" b="0" i="0">
                 <a:solidFill>
-                  <a:srgbClr val="29465B"/>
+                  <a:srgbClr val="224E6D"/>
                 </a:solidFill>
               </a:rPr>
               <a:t>사진 4</a:t>
@@ -6492,11 +6492,11 @@
             </a:avLst>
           </a:prstGeom>
           <a:solidFill>
-            <a:srgbClr val="D3E3EE"/>
+            <a:srgbClr val="D4E8F7"/>
           </a:solidFill>
           <a:ln w="19050">
             <a:solidFill>
-              <a:srgbClr val="497DA2"/>
+              <a:srgbClr val="5196C8"/>
             </a:solidFill>
             <a:prstDash val="dash"/>
           </a:ln>
@@ -6515,7 +6515,7 @@
             <a:r>
               <a:rPr sz="1200" b="0" i="0">
                 <a:solidFill>
-                  <a:srgbClr val="29465B"/>
+                  <a:srgbClr val="224E6D"/>
                 </a:solidFill>
               </a:rPr>
               <a:t>사진 5</a:t>
@@ -6540,11 +6540,11 @@
             </a:avLst>
           </a:prstGeom>
           <a:solidFill>
-            <a:srgbClr val="D3E3EE"/>
+            <a:srgbClr val="D4E8F7"/>
           </a:solidFill>
           <a:ln w="19050">
             <a:solidFill>
-              <a:srgbClr val="497DA2"/>
+              <a:srgbClr val="5196C8"/>
             </a:solidFill>
             <a:prstDash val="dash"/>
           </a:ln>
@@ -6563,7 +6563,7 @@
             <a:r>
               <a:rPr sz="1200" b="0" i="0">
                 <a:solidFill>
-                  <a:srgbClr val="29465B"/>
+                  <a:srgbClr val="224E6D"/>
                 </a:solidFill>
               </a:rPr>
               <a:t>사진 6</a:t>
@@ -6588,11 +6588,11 @@
             </a:avLst>
           </a:prstGeom>
           <a:solidFill>
-            <a:srgbClr val="D3E3EE"/>
+            <a:srgbClr val="D4E8F7"/>
           </a:solidFill>
           <a:ln w="19050">
             <a:solidFill>
-              <a:srgbClr val="497DA2"/>
+              <a:srgbClr val="5196C8"/>
             </a:solidFill>
             <a:prstDash val="dash"/>
           </a:ln>
@@ -6611,7 +6611,7 @@
             <a:r>
               <a:rPr sz="1200" b="0" i="0">
                 <a:solidFill>
-                  <a:srgbClr val="29465B"/>
+                  <a:srgbClr val="224E6D"/>
                 </a:solidFill>
               </a:rPr>
               <a:t>사진 7</a:t>
@@ -6636,11 +6636,11 @@
             </a:avLst>
           </a:prstGeom>
           <a:solidFill>
-            <a:srgbClr val="D3E3EE"/>
+            <a:srgbClr val="D4E8F7"/>
           </a:solidFill>
           <a:ln w="19050">
             <a:solidFill>
-              <a:srgbClr val="497DA2"/>
+              <a:srgbClr val="5196C8"/>
             </a:solidFill>
             <a:prstDash val="dash"/>
           </a:ln>
@@ -6659,7 +6659,7 @@
             <a:r>
               <a:rPr sz="1200" b="0" i="0">
                 <a:solidFill>
-                  <a:srgbClr val="29465B"/>
+                  <a:srgbClr val="224E6D"/>
                 </a:solidFill>
               </a:rPr>
               <a:t>사진 8</a:t>
@@ -6739,7 +6739,7 @@
             <a:r>
               <a:rPr sz="3400" b="1" i="0">
                 <a:solidFill>
-                  <a:srgbClr val="29465B"/>
+                  <a:srgbClr val="224E6D"/>
                 </a:solidFill>
               </a:rPr>
               <a:t>와 주셔서 고맙습니다</a:t>
@@ -6777,7 +6777,7 @@
             <a:r>
               <a:rPr sz="1700" b="0" i="1">
                 <a:solidFill>
-                  <a:srgbClr val="29465B"/>
+                  <a:srgbClr val="224E6D"/>
                 </a:solidFill>
               </a:rPr>
               <a:t>아이가 한 살이 되었습니다</a:t>
@@ -6842,34 +6842,34 @@
         <a:sysClr val="window" lastClr="FFFFFF"/>
       </a:lt1>
       <a:dk2>
-        <a:srgbClr val="29465B"/>
+        <a:srgbClr val="224E6D"/>
       </a:dk2>
       <a:lt2>
-        <a:srgbClr val="F1F5F9"/>
+        <a:srgbClr val="F3F8FC"/>
       </a:lt2>
       <a:accent1>
-        <a:srgbClr val="497DA2"/>
+        <a:srgbClr val="5196C8"/>
       </a:accent1>
       <a:accent2>
-        <a:srgbClr val="8D3F46"/>
+        <a:srgbClr val="339941"/>
       </a:accent2>
       <a:accent3>
-        <a:srgbClr val="29465B"/>
+        <a:srgbClr val="224E6D"/>
       </a:accent3>
       <a:accent4>
-        <a:srgbClr val="D3E3EE"/>
+        <a:srgbClr val="D4E8F7"/>
       </a:accent4>
       <a:accent5>
-        <a:srgbClr val="6B5E74"/>
+        <a:srgbClr val="429884"/>
       </a:accent5>
       <a:accent6>
-        <a:srgbClr val="7F909D"/>
+        <a:srgbClr val="7A95A7"/>
       </a:accent6>
       <a:hlink>
-        <a:srgbClr val="497DA2"/>
+        <a:srgbClr val="5196C8"/>
       </a:hlink>
       <a:folHlink>
-        <a:srgbClr val="29465B"/>
+        <a:srgbClr val="224E6D"/>
       </a:folHlink>
     </a:clrScheme>
     <a:fontScheme name="Office">
